--- a/cursos/recursos/ideas-que-ganan-partidas/14-el-caballo-y-la-doble-amenaza.pptx
+++ b/cursos/recursos/ideas-que-ganan-partidas/14-el-caballo-y-la-doble-amenaza.pptx
@@ -3434,7 +3434,7 @@
                 </a:solidFill>
                 <a:latin typeface="Calibri"/>
               </a:rPr>
-              <a:t>El caballo es la pieza de las horquillas: ataca en todas direcciones a la vez y nadie lo puede bloquear.</a:t>
+              <a:t>El caballo es la pieza de los tenedores: ataca en todas direcciones a la vez y nadie lo puede bloquear.</a:t>
             </a:r>
           </a:p>
         </p:txBody>
@@ -3711,7 +3711,7 @@
                 </a:solidFill>
                 <a:latin typeface="Calibri"/>
               </a:rPr>
-              <a:t>El caballo tiene una forma de moverse que no se parece a ninguna otra, y eso lo hace la pieza ideal para atacar dos cosas a la vez. Desde una casilla central ataca hasta ocho casillas, y como salta, ninguna pieza puede ponerse en medio. La horquilla de caballo al rey y la dama es la primera táctica que aprende cualquier jugador, y sigue ganando partidas en todos los niveles.</a:t>
+              <a:t>El caballo tiene una forma de moverse que no se parece a ninguna otra, y eso lo hace la pieza ideal para atacar dos cosas a la vez. Desde una casilla central ataca hasta ocho casillas, y como salta, ninguna pieza puede ponerse en medio. El tenedor de caballo al rey y la dama es la primera táctica que aprende cualquier jugador, y sigue ganando partidas en todos los niveles.</a:t>
             </a:r>
           </a:p>
         </p:txBody>
@@ -3954,7 +3954,7 @@
                 </a:solidFill>
                 <a:latin typeface="Calibri"/>
               </a:rPr>
-              <a:t>Las horquillas casi nunca aparecen solas: se preparan. Se obliga a dos piezas a ponerse a un salto de caballo de una misma casilla, con un jaque o un cambio, y después el caballo cae ahí. Por eso, cuando dos piezas rivales están a distancia de caballo entre sí, conviene buscar cómo llegar a la casilla que las ataca a ambas.</a:t>
+              <a:t>Los tenedores casi nunca aparecen solos: se preparan. Se obliga a dos piezas a ponerse a un salto de caballo de una misma casilla, con un jaque o un cambio, y después el caballo cae ahí. Por eso, cuando dos piezas rivales están a distancia de caballo entre sí, conviene buscar cómo llegar a la casilla que las ataca a ambas.</a:t>
             </a:r>
           </a:p>
         </p:txBody>
